--- a/3 am/الصيغ 2/cours 5/عرض الدرس.pptx
+++ b/3 am/الصيغ 2/cours 5/عرض الدرس.pptx
@@ -251,7 +251,7 @@
           <a:p>
             <a:fld id="{33E46DBA-FA3B-4C5F-B700-4671668DAB72}" type="datetimeFigureOut">
               <a:rPr lang="fr-FR" smtClean="0"/>
-              <a:t>14/01/2025</a:t>
+              <a:t>17/01/2025</a:t>
             </a:fld>
             <a:endParaRPr lang="fr-FR"/>
           </a:p>
@@ -421,7 +421,7 @@
           <a:p>
             <a:fld id="{33E46DBA-FA3B-4C5F-B700-4671668DAB72}" type="datetimeFigureOut">
               <a:rPr lang="fr-FR" smtClean="0"/>
-              <a:t>14/01/2025</a:t>
+              <a:t>17/01/2025</a:t>
             </a:fld>
             <a:endParaRPr lang="fr-FR"/>
           </a:p>
@@ -601,7 +601,7 @@
           <a:p>
             <a:fld id="{33E46DBA-FA3B-4C5F-B700-4671668DAB72}" type="datetimeFigureOut">
               <a:rPr lang="fr-FR" smtClean="0"/>
-              <a:t>14/01/2025</a:t>
+              <a:t>17/01/2025</a:t>
             </a:fld>
             <a:endParaRPr lang="fr-FR"/>
           </a:p>
@@ -771,7 +771,7 @@
           <a:p>
             <a:fld id="{33E46DBA-FA3B-4C5F-B700-4671668DAB72}" type="datetimeFigureOut">
               <a:rPr lang="fr-FR" smtClean="0"/>
-              <a:t>14/01/2025</a:t>
+              <a:t>17/01/2025</a:t>
             </a:fld>
             <a:endParaRPr lang="fr-FR"/>
           </a:p>
@@ -1017,7 +1017,7 @@
           <a:p>
             <a:fld id="{33E46DBA-FA3B-4C5F-B700-4671668DAB72}" type="datetimeFigureOut">
               <a:rPr lang="fr-FR" smtClean="0"/>
-              <a:t>14/01/2025</a:t>
+              <a:t>17/01/2025</a:t>
             </a:fld>
             <a:endParaRPr lang="fr-FR"/>
           </a:p>
@@ -1249,7 +1249,7 @@
           <a:p>
             <a:fld id="{33E46DBA-FA3B-4C5F-B700-4671668DAB72}" type="datetimeFigureOut">
               <a:rPr lang="fr-FR" smtClean="0"/>
-              <a:t>14/01/2025</a:t>
+              <a:t>17/01/2025</a:t>
             </a:fld>
             <a:endParaRPr lang="fr-FR"/>
           </a:p>
@@ -1616,7 +1616,7 @@
           <a:p>
             <a:fld id="{33E46DBA-FA3B-4C5F-B700-4671668DAB72}" type="datetimeFigureOut">
               <a:rPr lang="fr-FR" smtClean="0"/>
-              <a:t>14/01/2025</a:t>
+              <a:t>17/01/2025</a:t>
             </a:fld>
             <a:endParaRPr lang="fr-FR"/>
           </a:p>
@@ -1734,7 +1734,7 @@
           <a:p>
             <a:fld id="{33E46DBA-FA3B-4C5F-B700-4671668DAB72}" type="datetimeFigureOut">
               <a:rPr lang="fr-FR" smtClean="0"/>
-              <a:t>14/01/2025</a:t>
+              <a:t>17/01/2025</a:t>
             </a:fld>
             <a:endParaRPr lang="fr-FR"/>
           </a:p>
@@ -1829,7 +1829,7 @@
           <a:p>
             <a:fld id="{33E46DBA-FA3B-4C5F-B700-4671668DAB72}" type="datetimeFigureOut">
               <a:rPr lang="fr-FR" smtClean="0"/>
-              <a:t>14/01/2025</a:t>
+              <a:t>17/01/2025</a:t>
             </a:fld>
             <a:endParaRPr lang="fr-FR"/>
           </a:p>
@@ -2106,7 +2106,7 @@
           <a:p>
             <a:fld id="{33E46DBA-FA3B-4C5F-B700-4671668DAB72}" type="datetimeFigureOut">
               <a:rPr lang="fr-FR" smtClean="0"/>
-              <a:t>14/01/2025</a:t>
+              <a:t>17/01/2025</a:t>
             </a:fld>
             <a:endParaRPr lang="fr-FR"/>
           </a:p>
@@ -2359,7 +2359,7 @@
           <a:p>
             <a:fld id="{33E46DBA-FA3B-4C5F-B700-4671668DAB72}" type="datetimeFigureOut">
               <a:rPr lang="fr-FR" smtClean="0"/>
-              <a:t>14/01/2025</a:t>
+              <a:t>17/01/2025</a:t>
             </a:fld>
             <a:endParaRPr lang="fr-FR"/>
           </a:p>
@@ -2572,7 +2572,7 @@
           <a:p>
             <a:fld id="{33E46DBA-FA3B-4C5F-B700-4671668DAB72}" type="datetimeFigureOut">
               <a:rPr lang="fr-FR" smtClean="0"/>
-              <a:t>14/01/2025</a:t>
+              <a:t>17/01/2025</a:t>
             </a:fld>
             <a:endParaRPr lang="fr-FR"/>
           </a:p>
@@ -3048,11 +3048,11 @@
   <p:clrMapOvr>
     <a:masterClrMapping/>
   </p:clrMapOvr>
-  <mc:AlternateContent xmlns:mc="http://schemas.openxmlformats.org/markup-compatibility/2006">
-    <mc:Choice xmlns:p14="http://schemas.microsoft.com/office/powerpoint/2010/main" Requires="p14">
+  <mc:AlternateContent xmlns:mc="http://schemas.openxmlformats.org/markup-compatibility/2006" xmlns:p14="http://schemas.microsoft.com/office/powerpoint/2010/main">
+    <mc:Choice Requires="p14">
       <p:transition p14:dur="0"/>
     </mc:Choice>
-    <mc:Fallback>
+    <mc:Fallback xmlns="">
       <p:transition/>
     </mc:Fallback>
   </mc:AlternateContent>
@@ -3283,16 +3283,7 @@
                 <a:ea typeface="Calibri" panose="020F0502020204030204" pitchFamily="34" charset="0"/>
                 <a:cs typeface="Times New Roman" panose="02020603050405020304" pitchFamily="18" charset="0"/>
               </a:rPr>
-              <a:t>برأيك، كيف تسمى هذه </a:t>
-            </a:r>
-            <a:r>
-              <a:rPr lang="ar-DZ" sz="4000" dirty="0" smtClean="0">
-                <a:effectLst/>
-                <a:latin typeface="Calibri" panose="020F0502020204030204" pitchFamily="34" charset="0"/>
-                <a:ea typeface="Calibri" panose="020F0502020204030204" pitchFamily="34" charset="0"/>
-                <a:cs typeface="Times New Roman" panose="02020603050405020304" pitchFamily="18" charset="0"/>
-              </a:rPr>
-              <a:t>العبارات ؟</a:t>
+              <a:t>برأيك، كيف تسمى هذه العبارات ؟</a:t>
             </a:r>
             <a:endParaRPr lang="fr-FR" sz="3200" dirty="0" smtClean="0">
               <a:effectLst/>
@@ -3960,8 +3951,8 @@
         </p:nvSpPr>
         <p:spPr>
           <a:xfrm>
-            <a:off x="296217" y="4342718"/>
-            <a:ext cx="11642501" cy="2466316"/>
+            <a:off x="53791" y="4342718"/>
+            <a:ext cx="11884928" cy="2466316"/>
           </a:xfrm>
           <a:prstGeom prst="rect">
             <a:avLst/>
@@ -4054,7 +4045,47 @@
                 <a:ea typeface="Calibri" panose="020F0502020204030204" pitchFamily="34" charset="0"/>
                 <a:cs typeface="Times New Roman" panose="02020603050405020304" pitchFamily="18" charset="0"/>
               </a:rPr>
-              <a:t>الصيغة هي عبارة ............ أو ............ مكونة من ........... أو ............. تطبق </a:t>
+              <a:t>الصيغة هي عبارة ............ أو ............ مكونة من ........... أو </a:t>
+            </a:r>
+            <a:r>
+              <a:rPr lang="ar-SA" sz="3200" dirty="0" smtClean="0">
+                <a:effectLst/>
+                <a:ea typeface="Calibri" panose="020F0502020204030204" pitchFamily="34" charset="0"/>
+                <a:cs typeface="Times New Roman" panose="02020603050405020304" pitchFamily="18" charset="0"/>
+              </a:rPr>
+              <a:t>....</a:t>
+            </a:r>
+            <a:r>
+              <a:rPr lang="ar-DZ" sz="3200" dirty="0" smtClean="0">
+                <a:effectLst/>
+                <a:ea typeface="Calibri" panose="020F0502020204030204" pitchFamily="34" charset="0"/>
+                <a:cs typeface="Times New Roman" panose="02020603050405020304" pitchFamily="18" charset="0"/>
+              </a:rPr>
+              <a:t>..</a:t>
+            </a:r>
+            <a:r>
+              <a:rPr lang="ar-SA" sz="3200" dirty="0" smtClean="0">
+                <a:effectLst/>
+                <a:ea typeface="Calibri" panose="020F0502020204030204" pitchFamily="34" charset="0"/>
+                <a:cs typeface="Times New Roman" panose="02020603050405020304" pitchFamily="18" charset="0"/>
+              </a:rPr>
+              <a:t>.........</a:t>
+            </a:r>
+            <a:r>
+              <a:rPr lang="ar-DZ" sz="3200" dirty="0" smtClean="0">
+                <a:effectLst/>
+                <a:ea typeface="Calibri" panose="020F0502020204030204" pitchFamily="34" charset="0"/>
+                <a:cs typeface="Times New Roman" panose="02020603050405020304" pitchFamily="18" charset="0"/>
+              </a:rPr>
+              <a:t>  </a:t>
+            </a:r>
+            <a:r>
+              <a:rPr lang="ar-SA" sz="3200" dirty="0" smtClean="0">
+                <a:effectLst/>
+                <a:ea typeface="Calibri" panose="020F0502020204030204" pitchFamily="34" charset="0"/>
+                <a:cs typeface="Times New Roman" panose="02020603050405020304" pitchFamily="18" charset="0"/>
+              </a:rPr>
+              <a:t>تطبق </a:t>
             </a:r>
             <a:r>
               <a:rPr lang="ar-SA" sz="3200" dirty="0" err="1" smtClean="0">
@@ -4113,6 +4144,269 @@
               <a:t>(</a:t>
             </a:r>
             <a:endParaRPr lang="fr-FR" sz="3200" dirty="0"/>
+          </a:p>
+        </p:txBody>
+      </p:sp>
+      <p:sp>
+        <p:nvSpPr>
+          <p:cNvPr id="2" name="ZoneTexte 1"/>
+          <p:cNvSpPr txBox="1"/>
+          <p:nvPr/>
+        </p:nvSpPr>
+        <p:spPr>
+          <a:xfrm>
+            <a:off x="8229600" y="5774499"/>
+            <a:ext cx="1252603" cy="523220"/>
+          </a:xfrm>
+          <a:prstGeom prst="rect">
+            <a:avLst/>
+          </a:prstGeom>
+          <a:solidFill>
+            <a:schemeClr val="bg1"/>
+          </a:solidFill>
+        </p:spPr>
+        <p:txBody>
+          <a:bodyPr wrap="square" rtlCol="1">
+            <a:spAutoFit/>
+          </a:bodyPr>
+          <a:lstStyle/>
+          <a:p>
+            <a:pPr algn="ctr"/>
+            <a:r>
+              <a:rPr lang="ar-SA" sz="2800" b="1" dirty="0">
+                <a:solidFill>
+                  <a:srgbClr val="00B0F0"/>
+                </a:solidFill>
+                <a:latin typeface="Calibri" panose="020F0502020204030204" pitchFamily="34" charset="0"/>
+                <a:ea typeface="Calibri" panose="020F0502020204030204" pitchFamily="34" charset="0"/>
+                <a:cs typeface="Times New Roman" panose="02020603050405020304" pitchFamily="18" charset="0"/>
+              </a:rPr>
+              <a:t>حسابية</a:t>
+            </a:r>
+            <a:endParaRPr lang="ar-DZ" sz="2800" dirty="0">
+              <a:solidFill>
+                <a:srgbClr val="00B0F0"/>
+              </a:solidFill>
+            </a:endParaRPr>
+          </a:p>
+        </p:txBody>
+      </p:sp>
+      <p:sp>
+        <p:nvSpPr>
+          <p:cNvPr id="13" name="ZoneTexte 12"/>
+          <p:cNvSpPr txBox="1"/>
+          <p:nvPr/>
+        </p:nvSpPr>
+        <p:spPr>
+          <a:xfrm>
+            <a:off x="3995803" y="5768236"/>
+            <a:ext cx="1167831" cy="523220"/>
+          </a:xfrm>
+          <a:prstGeom prst="rect">
+            <a:avLst/>
+          </a:prstGeom>
+          <a:solidFill>
+            <a:schemeClr val="bg1"/>
+          </a:solidFill>
+        </p:spPr>
+        <p:txBody>
+          <a:bodyPr wrap="square" rtlCol="1">
+            <a:spAutoFit/>
+          </a:bodyPr>
+          <a:lstStyle/>
+          <a:p>
+            <a:pPr algn="ctr"/>
+            <a:r>
+              <a:rPr lang="ar-DZ" sz="2800" b="1" dirty="0" smtClean="0">
+                <a:solidFill>
+                  <a:srgbClr val="00B0F0"/>
+                </a:solidFill>
+                <a:latin typeface="Calibri" panose="020F0502020204030204" pitchFamily="34" charset="0"/>
+                <a:cs typeface="Times New Roman" panose="02020603050405020304" pitchFamily="18" charset="0"/>
+              </a:rPr>
+              <a:t>أعداد</a:t>
+            </a:r>
+            <a:endParaRPr lang="ar-DZ" sz="2400" dirty="0">
+              <a:solidFill>
+                <a:srgbClr val="00B0F0"/>
+              </a:solidFill>
+            </a:endParaRPr>
+          </a:p>
+        </p:txBody>
+      </p:sp>
+      <p:sp>
+        <p:nvSpPr>
+          <p:cNvPr id="14" name="ZoneTexte 13"/>
+          <p:cNvSpPr txBox="1"/>
+          <p:nvPr/>
+        </p:nvSpPr>
+        <p:spPr>
+          <a:xfrm>
+            <a:off x="6528971" y="5768236"/>
+            <a:ext cx="1365337" cy="523220"/>
+          </a:xfrm>
+          <a:prstGeom prst="rect">
+            <a:avLst/>
+          </a:prstGeom>
+          <a:solidFill>
+            <a:schemeClr val="bg1"/>
+          </a:solidFill>
+        </p:spPr>
+        <p:txBody>
+          <a:bodyPr wrap="square" rtlCol="1">
+            <a:spAutoFit/>
+          </a:bodyPr>
+          <a:lstStyle/>
+          <a:p>
+            <a:pPr algn="ctr"/>
+            <a:r>
+              <a:rPr lang="ar-SA" sz="2800" b="1" dirty="0">
+                <a:solidFill>
+                  <a:srgbClr val="00B0F0"/>
+                </a:solidFill>
+                <a:latin typeface="Calibri" panose="020F0502020204030204" pitchFamily="34" charset="0"/>
+                <a:ea typeface="Calibri" panose="020F0502020204030204" pitchFamily="34" charset="0"/>
+                <a:cs typeface="Times New Roman" panose="02020603050405020304" pitchFamily="18" charset="0"/>
+              </a:rPr>
+              <a:t>منطقية</a:t>
+            </a:r>
+            <a:endParaRPr lang="ar-DZ" sz="2400" dirty="0">
+              <a:solidFill>
+                <a:srgbClr val="00B0F0"/>
+              </a:solidFill>
+            </a:endParaRPr>
+          </a:p>
+        </p:txBody>
+      </p:sp>
+      <p:sp>
+        <p:nvSpPr>
+          <p:cNvPr id="15" name="ZoneTexte 14"/>
+          <p:cNvSpPr txBox="1"/>
+          <p:nvPr/>
+        </p:nvSpPr>
+        <p:spPr>
+          <a:xfrm>
+            <a:off x="9644955" y="6248690"/>
+            <a:ext cx="1211934" cy="523220"/>
+          </a:xfrm>
+          <a:prstGeom prst="rect">
+            <a:avLst/>
+          </a:prstGeom>
+          <a:solidFill>
+            <a:schemeClr val="bg1"/>
+          </a:solidFill>
+        </p:spPr>
+        <p:txBody>
+          <a:bodyPr wrap="square" rtlCol="1">
+            <a:spAutoFit/>
+          </a:bodyPr>
+          <a:lstStyle/>
+          <a:p>
+            <a:pPr algn="ctr"/>
+            <a:r>
+              <a:rPr lang="ar-SA" sz="2800" b="1" dirty="0">
+                <a:solidFill>
+                  <a:srgbClr val="00B0F0"/>
+                </a:solidFill>
+                <a:latin typeface="Calibri" panose="020F0502020204030204" pitchFamily="34" charset="0"/>
+                <a:ea typeface="Calibri" panose="020F0502020204030204" pitchFamily="34" charset="0"/>
+                <a:cs typeface="Times New Roman" panose="02020603050405020304" pitchFamily="18" charset="0"/>
+              </a:rPr>
+              <a:t>حسابية</a:t>
+            </a:r>
+            <a:endParaRPr lang="ar-DZ" sz="2800" dirty="0">
+              <a:solidFill>
+                <a:srgbClr val="00B0F0"/>
+              </a:solidFill>
+            </a:endParaRPr>
+          </a:p>
+        </p:txBody>
+      </p:sp>
+      <p:sp>
+        <p:nvSpPr>
+          <p:cNvPr id="16" name="ZoneTexte 15"/>
+          <p:cNvSpPr txBox="1"/>
+          <p:nvPr/>
+        </p:nvSpPr>
+        <p:spPr>
+          <a:xfrm>
+            <a:off x="4428964" y="6282320"/>
+            <a:ext cx="2082231" cy="523220"/>
+          </a:xfrm>
+          <a:prstGeom prst="rect">
+            <a:avLst/>
+          </a:prstGeom>
+          <a:solidFill>
+            <a:schemeClr val="bg1"/>
+          </a:solidFill>
+        </p:spPr>
+        <p:txBody>
+          <a:bodyPr wrap="square" rtlCol="1">
+            <a:spAutoFit/>
+          </a:bodyPr>
+          <a:lstStyle/>
+          <a:p>
+            <a:pPr algn="ctr"/>
+            <a:r>
+              <a:rPr lang="ar-SA" sz="2800" b="1" dirty="0">
+                <a:solidFill>
+                  <a:srgbClr val="00B0F0"/>
+                </a:solidFill>
+                <a:latin typeface="Calibri" panose="020F0502020204030204" pitchFamily="34" charset="0"/>
+                <a:ea typeface="Calibri" panose="020F0502020204030204" pitchFamily="34" charset="0"/>
+                <a:cs typeface="Times New Roman" panose="02020603050405020304" pitchFamily="18" charset="0"/>
+              </a:rPr>
+              <a:t>منطقية</a:t>
+            </a:r>
+            <a:endParaRPr lang="ar-DZ" sz="2800" dirty="0">
+              <a:solidFill>
+                <a:srgbClr val="00B0F0"/>
+              </a:solidFill>
+            </a:endParaRPr>
+          </a:p>
+        </p:txBody>
+      </p:sp>
+      <p:sp>
+        <p:nvSpPr>
+          <p:cNvPr id="17" name="ZoneTexte 16"/>
+          <p:cNvSpPr txBox="1"/>
+          <p:nvPr/>
+        </p:nvSpPr>
+        <p:spPr>
+          <a:xfrm>
+            <a:off x="1897691" y="5768236"/>
+            <a:ext cx="1806659" cy="523220"/>
+          </a:xfrm>
+          <a:prstGeom prst="rect">
+            <a:avLst/>
+          </a:prstGeom>
+          <a:solidFill>
+            <a:schemeClr val="bg1"/>
+          </a:solidFill>
+        </p:spPr>
+        <p:txBody>
+          <a:bodyPr wrap="square" rtlCol="1">
+            <a:spAutoFit/>
+          </a:bodyPr>
+          <a:lstStyle/>
+          <a:p>
+            <a:pPr algn="ctr"/>
+            <a:r>
+              <a:rPr lang="ar-SA" sz="2800" b="1" dirty="0">
+                <a:solidFill>
+                  <a:srgbClr val="00B0F0"/>
+                </a:solidFill>
+                <a:latin typeface="Calibri" panose="020F0502020204030204" pitchFamily="34" charset="0"/>
+                <a:ea typeface="Calibri" panose="020F0502020204030204" pitchFamily="34" charset="0"/>
+                <a:cs typeface="Times New Roman" panose="02020603050405020304" pitchFamily="18" charset="0"/>
+              </a:rPr>
+              <a:t>مراجع الخلايا</a:t>
+            </a:r>
+            <a:endParaRPr lang="ar-DZ" sz="2800" dirty="0">
+              <a:solidFill>
+                <a:srgbClr val="00B0F0"/>
+              </a:solidFill>
+            </a:endParaRPr>
           </a:p>
         </p:txBody>
       </p:sp>
@@ -4132,9 +4426,358 @@
   <p:timing>
     <p:tnLst>
       <p:par>
-        <p:cTn id="1" dur="indefinite" restart="never" nodeType="tmRoot"/>
+        <p:cTn id="1" dur="indefinite" restart="never" nodeType="tmRoot">
+          <p:childTnLst>
+            <p:seq concurrent="1" nextAc="seek">
+              <p:cTn id="2" dur="indefinite" nodeType="mainSeq">
+                <p:childTnLst>
+                  <p:par>
+                    <p:cTn id="3" fill="hold">
+                      <p:stCondLst>
+                        <p:cond delay="indefinite"/>
+                      </p:stCondLst>
+                      <p:childTnLst>
+                        <p:par>
+                          <p:cTn id="4" fill="hold">
+                            <p:stCondLst>
+                              <p:cond delay="0"/>
+                            </p:stCondLst>
+                            <p:childTnLst>
+                              <p:par>
+                                <p:cTn id="5" presetID="10" presetClass="entr" presetSubtype="0" fill="hold" grpId="0" nodeType="clickEffect">
+                                  <p:stCondLst>
+                                    <p:cond delay="0"/>
+                                  </p:stCondLst>
+                                  <p:childTnLst>
+                                    <p:set>
+                                      <p:cBhvr>
+                                        <p:cTn id="6" dur="1" fill="hold">
+                                          <p:stCondLst>
+                                            <p:cond delay="0"/>
+                                          </p:stCondLst>
+                                        </p:cTn>
+                                        <p:tgtEl>
+                                          <p:spTgt spid="2"/>
+                                        </p:tgtEl>
+                                        <p:attrNameLst>
+                                          <p:attrName>style.visibility</p:attrName>
+                                        </p:attrNameLst>
+                                      </p:cBhvr>
+                                      <p:to>
+                                        <p:strVal val="visible"/>
+                                      </p:to>
+                                    </p:set>
+                                    <p:animEffect transition="in" filter="fade">
+                                      <p:cBhvr>
+                                        <p:cTn id="7" dur="500"/>
+                                        <p:tgtEl>
+                                          <p:spTgt spid="2"/>
+                                        </p:tgtEl>
+                                      </p:cBhvr>
+                                    </p:animEffect>
+                                  </p:childTnLst>
+                                </p:cTn>
+                              </p:par>
+                            </p:childTnLst>
+                          </p:cTn>
+                        </p:par>
+                      </p:childTnLst>
+                    </p:cTn>
+                  </p:par>
+                  <p:par>
+                    <p:cTn id="8" fill="hold">
+                      <p:stCondLst>
+                        <p:cond delay="indefinite"/>
+                      </p:stCondLst>
+                      <p:childTnLst>
+                        <p:par>
+                          <p:cTn id="9" fill="hold">
+                            <p:stCondLst>
+                              <p:cond delay="0"/>
+                            </p:stCondLst>
+                            <p:childTnLst>
+                              <p:par>
+                                <p:cTn id="10" presetID="10" presetClass="entr" presetSubtype="0" fill="hold" grpId="0" nodeType="clickEffect">
+                                  <p:stCondLst>
+                                    <p:cond delay="0"/>
+                                  </p:stCondLst>
+                                  <p:childTnLst>
+                                    <p:set>
+                                      <p:cBhvr>
+                                        <p:cTn id="11" dur="1" fill="hold">
+                                          <p:stCondLst>
+                                            <p:cond delay="0"/>
+                                          </p:stCondLst>
+                                        </p:cTn>
+                                        <p:tgtEl>
+                                          <p:spTgt spid="14"/>
+                                        </p:tgtEl>
+                                        <p:attrNameLst>
+                                          <p:attrName>style.visibility</p:attrName>
+                                        </p:attrNameLst>
+                                      </p:cBhvr>
+                                      <p:to>
+                                        <p:strVal val="visible"/>
+                                      </p:to>
+                                    </p:set>
+                                    <p:animEffect transition="in" filter="fade">
+                                      <p:cBhvr>
+                                        <p:cTn id="12" dur="500"/>
+                                        <p:tgtEl>
+                                          <p:spTgt spid="14"/>
+                                        </p:tgtEl>
+                                      </p:cBhvr>
+                                    </p:animEffect>
+                                  </p:childTnLst>
+                                </p:cTn>
+                              </p:par>
+                            </p:childTnLst>
+                          </p:cTn>
+                        </p:par>
+                      </p:childTnLst>
+                    </p:cTn>
+                  </p:par>
+                  <p:par>
+                    <p:cTn id="13" fill="hold">
+                      <p:stCondLst>
+                        <p:cond delay="indefinite"/>
+                      </p:stCondLst>
+                      <p:childTnLst>
+                        <p:par>
+                          <p:cTn id="14" fill="hold">
+                            <p:stCondLst>
+                              <p:cond delay="0"/>
+                            </p:stCondLst>
+                            <p:childTnLst>
+                              <p:par>
+                                <p:cTn id="15" presetID="10" presetClass="entr" presetSubtype="0" fill="hold" grpId="0" nodeType="clickEffect">
+                                  <p:stCondLst>
+                                    <p:cond delay="0"/>
+                                  </p:stCondLst>
+                                  <p:childTnLst>
+                                    <p:set>
+                                      <p:cBhvr>
+                                        <p:cTn id="16" dur="1" fill="hold">
+                                          <p:stCondLst>
+                                            <p:cond delay="0"/>
+                                          </p:stCondLst>
+                                        </p:cTn>
+                                        <p:tgtEl>
+                                          <p:spTgt spid="13"/>
+                                        </p:tgtEl>
+                                        <p:attrNameLst>
+                                          <p:attrName>style.visibility</p:attrName>
+                                        </p:attrNameLst>
+                                      </p:cBhvr>
+                                      <p:to>
+                                        <p:strVal val="visible"/>
+                                      </p:to>
+                                    </p:set>
+                                    <p:animEffect transition="in" filter="fade">
+                                      <p:cBhvr>
+                                        <p:cTn id="17" dur="500"/>
+                                        <p:tgtEl>
+                                          <p:spTgt spid="13"/>
+                                        </p:tgtEl>
+                                      </p:cBhvr>
+                                    </p:animEffect>
+                                  </p:childTnLst>
+                                </p:cTn>
+                              </p:par>
+                            </p:childTnLst>
+                          </p:cTn>
+                        </p:par>
+                      </p:childTnLst>
+                    </p:cTn>
+                  </p:par>
+                  <p:par>
+                    <p:cTn id="18" fill="hold">
+                      <p:stCondLst>
+                        <p:cond delay="indefinite"/>
+                      </p:stCondLst>
+                      <p:childTnLst>
+                        <p:par>
+                          <p:cTn id="19" fill="hold">
+                            <p:stCondLst>
+                              <p:cond delay="0"/>
+                            </p:stCondLst>
+                            <p:childTnLst>
+                              <p:par>
+                                <p:cTn id="20" presetID="10" presetClass="entr" presetSubtype="0" fill="hold" grpId="0" nodeType="clickEffect">
+                                  <p:stCondLst>
+                                    <p:cond delay="0"/>
+                                  </p:stCondLst>
+                                  <p:childTnLst>
+                                    <p:set>
+                                      <p:cBhvr>
+                                        <p:cTn id="21" dur="1" fill="hold">
+                                          <p:stCondLst>
+                                            <p:cond delay="0"/>
+                                          </p:stCondLst>
+                                        </p:cTn>
+                                        <p:tgtEl>
+                                          <p:spTgt spid="17"/>
+                                        </p:tgtEl>
+                                        <p:attrNameLst>
+                                          <p:attrName>style.visibility</p:attrName>
+                                        </p:attrNameLst>
+                                      </p:cBhvr>
+                                      <p:to>
+                                        <p:strVal val="visible"/>
+                                      </p:to>
+                                    </p:set>
+                                    <p:animEffect transition="in" filter="fade">
+                                      <p:cBhvr>
+                                        <p:cTn id="22" dur="500"/>
+                                        <p:tgtEl>
+                                          <p:spTgt spid="17"/>
+                                        </p:tgtEl>
+                                      </p:cBhvr>
+                                    </p:animEffect>
+                                  </p:childTnLst>
+                                </p:cTn>
+                              </p:par>
+                            </p:childTnLst>
+                          </p:cTn>
+                        </p:par>
+                      </p:childTnLst>
+                    </p:cTn>
+                  </p:par>
+                  <p:par>
+                    <p:cTn id="23" fill="hold">
+                      <p:stCondLst>
+                        <p:cond delay="indefinite"/>
+                      </p:stCondLst>
+                      <p:childTnLst>
+                        <p:par>
+                          <p:cTn id="24" fill="hold">
+                            <p:stCondLst>
+                              <p:cond delay="0"/>
+                            </p:stCondLst>
+                            <p:childTnLst>
+                              <p:par>
+                                <p:cTn id="25" presetID="10" presetClass="entr" presetSubtype="0" fill="hold" grpId="0" nodeType="clickEffect">
+                                  <p:stCondLst>
+                                    <p:cond delay="0"/>
+                                  </p:stCondLst>
+                                  <p:childTnLst>
+                                    <p:set>
+                                      <p:cBhvr>
+                                        <p:cTn id="26" dur="1" fill="hold">
+                                          <p:stCondLst>
+                                            <p:cond delay="0"/>
+                                          </p:stCondLst>
+                                        </p:cTn>
+                                        <p:tgtEl>
+                                          <p:spTgt spid="15"/>
+                                        </p:tgtEl>
+                                        <p:attrNameLst>
+                                          <p:attrName>style.visibility</p:attrName>
+                                        </p:attrNameLst>
+                                      </p:cBhvr>
+                                      <p:to>
+                                        <p:strVal val="visible"/>
+                                      </p:to>
+                                    </p:set>
+                                    <p:animEffect transition="in" filter="fade">
+                                      <p:cBhvr>
+                                        <p:cTn id="27" dur="500"/>
+                                        <p:tgtEl>
+                                          <p:spTgt spid="15"/>
+                                        </p:tgtEl>
+                                      </p:cBhvr>
+                                    </p:animEffect>
+                                  </p:childTnLst>
+                                </p:cTn>
+                              </p:par>
+                            </p:childTnLst>
+                          </p:cTn>
+                        </p:par>
+                      </p:childTnLst>
+                    </p:cTn>
+                  </p:par>
+                  <p:par>
+                    <p:cTn id="28" fill="hold">
+                      <p:stCondLst>
+                        <p:cond delay="indefinite"/>
+                      </p:stCondLst>
+                      <p:childTnLst>
+                        <p:par>
+                          <p:cTn id="29" fill="hold">
+                            <p:stCondLst>
+                              <p:cond delay="0"/>
+                            </p:stCondLst>
+                            <p:childTnLst>
+                              <p:par>
+                                <p:cTn id="30" presetID="10" presetClass="entr" presetSubtype="0" fill="hold" grpId="0" nodeType="clickEffect">
+                                  <p:stCondLst>
+                                    <p:cond delay="0"/>
+                                  </p:stCondLst>
+                                  <p:childTnLst>
+                                    <p:set>
+                                      <p:cBhvr>
+                                        <p:cTn id="31" dur="1" fill="hold">
+                                          <p:stCondLst>
+                                            <p:cond delay="0"/>
+                                          </p:stCondLst>
+                                        </p:cTn>
+                                        <p:tgtEl>
+                                          <p:spTgt spid="16"/>
+                                        </p:tgtEl>
+                                        <p:attrNameLst>
+                                          <p:attrName>style.visibility</p:attrName>
+                                        </p:attrNameLst>
+                                      </p:cBhvr>
+                                      <p:to>
+                                        <p:strVal val="visible"/>
+                                      </p:to>
+                                    </p:set>
+                                    <p:animEffect transition="in" filter="fade">
+                                      <p:cBhvr>
+                                        <p:cTn id="32" dur="500"/>
+                                        <p:tgtEl>
+                                          <p:spTgt spid="16"/>
+                                        </p:tgtEl>
+                                      </p:cBhvr>
+                                    </p:animEffect>
+                                  </p:childTnLst>
+                                </p:cTn>
+                              </p:par>
+                            </p:childTnLst>
+                          </p:cTn>
+                        </p:par>
+                      </p:childTnLst>
+                    </p:cTn>
+                  </p:par>
+                </p:childTnLst>
+              </p:cTn>
+              <p:prevCondLst>
+                <p:cond evt="onPrev" delay="0">
+                  <p:tgtEl>
+                    <p:sldTgt/>
+                  </p:tgtEl>
+                </p:cond>
+              </p:prevCondLst>
+              <p:nextCondLst>
+                <p:cond evt="onNext" delay="0">
+                  <p:tgtEl>
+                    <p:sldTgt/>
+                  </p:tgtEl>
+                </p:cond>
+              </p:nextCondLst>
+            </p:seq>
+          </p:childTnLst>
+        </p:cTn>
       </p:par>
     </p:tnLst>
+    <p:bldLst>
+      <p:bldP spid="2" grpId="0" animBg="1"/>
+      <p:bldP spid="13" grpId="0" animBg="1"/>
+      <p:bldP spid="14" grpId="0" animBg="1"/>
+      <p:bldP spid="15" grpId="0" animBg="1"/>
+      <p:bldP spid="16" grpId="0" animBg="1"/>
+      <p:bldP spid="17" grpId="0" animBg="1"/>
+    </p:bldLst>
   </p:timing>
 </p:sld>
 </file>
@@ -4164,7 +4807,7 @@
         </p:nvSpPr>
         <p:spPr>
           <a:xfrm>
-            <a:off x="6915955" y="3825018"/>
+            <a:off x="7016237" y="3686187"/>
             <a:ext cx="4752303" cy="2009108"/>
           </a:xfrm>
           <a:prstGeom prst="chevron">
@@ -4230,7 +4873,7 @@
         </p:nvSpPr>
         <p:spPr>
           <a:xfrm>
-            <a:off x="611747" y="3825018"/>
+            <a:off x="636872" y="3593891"/>
             <a:ext cx="5628068" cy="2193700"/>
           </a:xfrm>
           <a:prstGeom prst="chevron">
@@ -4297,7 +4940,7 @@
         </p:nvSpPr>
         <p:spPr>
           <a:xfrm>
-            <a:off x="6439436" y="1534558"/>
+            <a:off x="6464561" y="1303431"/>
             <a:ext cx="5482671" cy="2021983"/>
           </a:xfrm>
           <a:prstGeom prst="chevron">
@@ -4387,7 +5030,7 @@
         </p:nvSpPr>
         <p:spPr>
           <a:xfrm>
-            <a:off x="515154" y="1489483"/>
+            <a:off x="540279" y="1258356"/>
             <a:ext cx="5705341" cy="2112132"/>
           </a:xfrm>
           <a:prstGeom prst="chevron">
@@ -4480,7 +5123,7 @@
         </p:nvSpPr>
         <p:spPr bwMode="auto">
           <a:xfrm>
-            <a:off x="4829578" y="441657"/>
+            <a:off x="4768477" y="360551"/>
             <a:ext cx="7117654" cy="861774"/>
           </a:xfrm>
           <a:prstGeom prst="rect">
@@ -4529,7 +5172,7 @@
           </a:bodyPr>
           <a:lstStyle/>
           <a:p>
-            <a:pPr marL="0" marR="0" lvl="0" indent="0" algn="l" defTabSz="914400" rtl="1" eaLnBrk="0" fontAlgn="base" latinLnBrk="0" hangingPunct="0">
+            <a:pPr marL="0" marR="0" lvl="0" indent="0" algn="r" defTabSz="914400" rtl="1" eaLnBrk="0" fontAlgn="base" latinLnBrk="0" hangingPunct="0">
               <a:lnSpc>
                 <a:spcPct val="100000"/>
               </a:lnSpc>
@@ -4571,7 +5214,7 @@
             </a:endParaRPr>
           </a:p>
           <a:p>
-            <a:pPr marL="0" marR="0" lvl="0" indent="0" algn="l" defTabSz="914400" rtl="0" eaLnBrk="0" fontAlgn="base" latinLnBrk="0" hangingPunct="0">
+            <a:pPr marL="0" marR="0" lvl="0" indent="0" algn="r" defTabSz="914400" rtl="0" eaLnBrk="0" fontAlgn="base" latinLnBrk="0" hangingPunct="0">
               <a:lnSpc>
                 <a:spcPct val="100000"/>
               </a:lnSpc>
@@ -4611,7 +5254,7 @@
         </p:nvSpPr>
         <p:spPr bwMode="auto">
           <a:xfrm>
-            <a:off x="6465195" y="6020013"/>
+            <a:off x="6914326" y="5893403"/>
             <a:ext cx="4854214" cy="800219"/>
           </a:xfrm>
           <a:prstGeom prst="rect">
@@ -4690,7 +5333,7 @@
             </a:endParaRPr>
           </a:p>
           <a:p>
-            <a:pPr marL="0" marR="0" lvl="0" indent="0" algn="l" defTabSz="914400" rtl="0" eaLnBrk="0" fontAlgn="base" latinLnBrk="0" hangingPunct="0">
+            <a:pPr marL="0" marR="0" lvl="0" indent="0" algn="r" defTabSz="914400" rtl="1" eaLnBrk="0" fontAlgn="base" latinLnBrk="0" hangingPunct="0">
               <a:lnSpc>
                 <a:spcPct val="100000"/>
               </a:lnSpc>
@@ -4742,6 +5385,218 @@
               </a:solidFill>
               <a:effectLst/>
               <a:latin typeface="Arial" panose="020B0604020202020204" pitchFamily="34" charset="0"/>
+            </a:endParaRPr>
+          </a:p>
+        </p:txBody>
+      </p:sp>
+      <p:sp>
+        <p:nvSpPr>
+          <p:cNvPr id="8" name="ZoneTexte 7"/>
+          <p:cNvSpPr txBox="1"/>
+          <p:nvPr/>
+        </p:nvSpPr>
+        <p:spPr>
+          <a:xfrm>
+            <a:off x="11010451" y="4455971"/>
+            <a:ext cx="334083" cy="461665"/>
+          </a:xfrm>
+          <a:prstGeom prst="rect">
+            <a:avLst/>
+          </a:prstGeom>
+          <a:ln/>
+        </p:spPr>
+        <p:style>
+          <a:lnRef idx="2">
+            <a:schemeClr val="dk1"/>
+          </a:lnRef>
+          <a:fillRef idx="1">
+            <a:schemeClr val="lt1"/>
+          </a:fillRef>
+          <a:effectRef idx="0">
+            <a:schemeClr val="dk1"/>
+          </a:effectRef>
+          <a:fontRef idx="minor">
+            <a:schemeClr val="dk1"/>
+          </a:fontRef>
+        </p:style>
+        <p:txBody>
+          <a:bodyPr wrap="square" rtlCol="1">
+            <a:spAutoFit/>
+          </a:bodyPr>
+          <a:lstStyle/>
+          <a:p>
+            <a:pPr algn="ctr"/>
+            <a:r>
+              <a:rPr lang="ar-DZ" sz="2400" b="1" dirty="0" smtClean="0">
+                <a:solidFill>
+                  <a:srgbClr val="FF0000"/>
+                </a:solidFill>
+              </a:rPr>
+              <a:t>1</a:t>
+            </a:r>
+            <a:endParaRPr lang="ar-DZ" sz="2400" b="1" dirty="0">
+              <a:solidFill>
+                <a:srgbClr val="FF0000"/>
+              </a:solidFill>
+            </a:endParaRPr>
+          </a:p>
+        </p:txBody>
+      </p:sp>
+      <p:sp>
+        <p:nvSpPr>
+          <p:cNvPr id="9" name="ZoneTexte 8"/>
+          <p:cNvSpPr txBox="1"/>
+          <p:nvPr/>
+        </p:nvSpPr>
+        <p:spPr>
+          <a:xfrm>
+            <a:off x="5492735" y="2081796"/>
+            <a:ext cx="334083" cy="461665"/>
+          </a:xfrm>
+          <a:prstGeom prst="rect">
+            <a:avLst/>
+          </a:prstGeom>
+          <a:ln/>
+        </p:spPr>
+        <p:style>
+          <a:lnRef idx="2">
+            <a:schemeClr val="dk1"/>
+          </a:lnRef>
+          <a:fillRef idx="1">
+            <a:schemeClr val="lt1"/>
+          </a:fillRef>
+          <a:effectRef idx="0">
+            <a:schemeClr val="dk1"/>
+          </a:effectRef>
+          <a:fontRef idx="minor">
+            <a:schemeClr val="dk1"/>
+          </a:fontRef>
+        </p:style>
+        <p:txBody>
+          <a:bodyPr wrap="square" rtlCol="1">
+            <a:spAutoFit/>
+          </a:bodyPr>
+          <a:lstStyle/>
+          <a:p>
+            <a:pPr algn="ctr"/>
+            <a:r>
+              <a:rPr lang="ar-DZ" sz="2400" b="1" dirty="0" smtClean="0">
+                <a:solidFill>
+                  <a:srgbClr val="FF0000"/>
+                </a:solidFill>
+              </a:rPr>
+              <a:t>4</a:t>
+            </a:r>
+            <a:endParaRPr lang="ar-DZ" sz="2400" b="1" dirty="0">
+              <a:solidFill>
+                <a:srgbClr val="FF0000"/>
+              </a:solidFill>
+            </a:endParaRPr>
+          </a:p>
+        </p:txBody>
+      </p:sp>
+      <p:sp>
+        <p:nvSpPr>
+          <p:cNvPr id="10" name="ZoneTexte 9"/>
+          <p:cNvSpPr txBox="1"/>
+          <p:nvPr/>
+        </p:nvSpPr>
+        <p:spPr>
+          <a:xfrm>
+            <a:off x="11190018" y="2069270"/>
+            <a:ext cx="334083" cy="461665"/>
+          </a:xfrm>
+          <a:prstGeom prst="rect">
+            <a:avLst/>
+          </a:prstGeom>
+          <a:ln/>
+        </p:spPr>
+        <p:style>
+          <a:lnRef idx="2">
+            <a:schemeClr val="dk1"/>
+          </a:lnRef>
+          <a:fillRef idx="1">
+            <a:schemeClr val="lt1"/>
+          </a:fillRef>
+          <a:effectRef idx="0">
+            <a:schemeClr val="dk1"/>
+          </a:effectRef>
+          <a:fontRef idx="minor">
+            <a:schemeClr val="dk1"/>
+          </a:fontRef>
+        </p:style>
+        <p:txBody>
+          <a:bodyPr wrap="square" rtlCol="1">
+            <a:spAutoFit/>
+          </a:bodyPr>
+          <a:lstStyle/>
+          <a:p>
+            <a:pPr algn="ctr"/>
+            <a:r>
+              <a:rPr lang="ar-DZ" sz="2400" b="1" dirty="0" smtClean="0">
+                <a:solidFill>
+                  <a:srgbClr val="FF0000"/>
+                </a:solidFill>
+              </a:rPr>
+              <a:t>3</a:t>
+            </a:r>
+            <a:endParaRPr lang="ar-DZ" sz="2400" b="1" dirty="0">
+              <a:solidFill>
+                <a:srgbClr val="FF0000"/>
+              </a:solidFill>
+            </a:endParaRPr>
+          </a:p>
+        </p:txBody>
+      </p:sp>
+      <p:sp>
+        <p:nvSpPr>
+          <p:cNvPr id="11" name="ZoneTexte 10"/>
+          <p:cNvSpPr txBox="1"/>
+          <p:nvPr/>
+        </p:nvSpPr>
+        <p:spPr>
+          <a:xfrm>
+            <a:off x="5480210" y="4438831"/>
+            <a:ext cx="334083" cy="461665"/>
+          </a:xfrm>
+          <a:prstGeom prst="rect">
+            <a:avLst/>
+          </a:prstGeom>
+          <a:ln/>
+        </p:spPr>
+        <p:style>
+          <a:lnRef idx="2">
+            <a:schemeClr val="dk1"/>
+          </a:lnRef>
+          <a:fillRef idx="1">
+            <a:schemeClr val="lt1"/>
+          </a:fillRef>
+          <a:effectRef idx="0">
+            <a:schemeClr val="dk1"/>
+          </a:effectRef>
+          <a:fontRef idx="minor">
+            <a:schemeClr val="dk1"/>
+          </a:fontRef>
+        </p:style>
+        <p:txBody>
+          <a:bodyPr wrap="square" rtlCol="1">
+            <a:spAutoFit/>
+          </a:bodyPr>
+          <a:lstStyle/>
+          <a:p>
+            <a:pPr algn="ctr"/>
+            <a:r>
+              <a:rPr lang="ar-DZ" sz="2400" b="1" dirty="0" smtClean="0">
+                <a:solidFill>
+                  <a:srgbClr val="FF0000"/>
+                </a:solidFill>
+              </a:rPr>
+              <a:t>2</a:t>
+            </a:r>
+            <a:endParaRPr lang="ar-DZ" sz="2400" b="1" dirty="0">
+              <a:solidFill>
+                <a:srgbClr val="FF0000"/>
+              </a:solidFill>
             </a:endParaRPr>
           </a:p>
         </p:txBody>
@@ -4762,9 +5617,250 @@
   <p:timing>
     <p:tnLst>
       <p:par>
-        <p:cTn id="1" dur="indefinite" restart="never" nodeType="tmRoot"/>
+        <p:cTn id="1" dur="indefinite" restart="never" nodeType="tmRoot">
+          <p:childTnLst>
+            <p:seq concurrent="1" nextAc="seek">
+              <p:cTn id="2" dur="indefinite" nodeType="mainSeq">
+                <p:childTnLst>
+                  <p:par>
+                    <p:cTn id="3" fill="hold">
+                      <p:stCondLst>
+                        <p:cond delay="indefinite"/>
+                      </p:stCondLst>
+                      <p:childTnLst>
+                        <p:par>
+                          <p:cTn id="4" fill="hold">
+                            <p:stCondLst>
+                              <p:cond delay="0"/>
+                            </p:stCondLst>
+                            <p:childTnLst>
+                              <p:par>
+                                <p:cTn id="5" presetID="10" presetClass="entr" presetSubtype="0" fill="hold" grpId="0" nodeType="clickEffect">
+                                  <p:stCondLst>
+                                    <p:cond delay="0"/>
+                                  </p:stCondLst>
+                                  <p:childTnLst>
+                                    <p:set>
+                                      <p:cBhvr>
+                                        <p:cTn id="6" dur="1" fill="hold">
+                                          <p:stCondLst>
+                                            <p:cond delay="0"/>
+                                          </p:stCondLst>
+                                        </p:cTn>
+                                        <p:tgtEl>
+                                          <p:spTgt spid="8"/>
+                                        </p:tgtEl>
+                                        <p:attrNameLst>
+                                          <p:attrName>style.visibility</p:attrName>
+                                        </p:attrNameLst>
+                                      </p:cBhvr>
+                                      <p:to>
+                                        <p:strVal val="visible"/>
+                                      </p:to>
+                                    </p:set>
+                                    <p:animEffect transition="in" filter="fade">
+                                      <p:cBhvr>
+                                        <p:cTn id="7" dur="500"/>
+                                        <p:tgtEl>
+                                          <p:spTgt spid="8"/>
+                                        </p:tgtEl>
+                                      </p:cBhvr>
+                                    </p:animEffect>
+                                  </p:childTnLst>
+                                </p:cTn>
+                              </p:par>
+                            </p:childTnLst>
+                          </p:cTn>
+                        </p:par>
+                      </p:childTnLst>
+                    </p:cTn>
+                  </p:par>
+                  <p:par>
+                    <p:cTn id="8" fill="hold">
+                      <p:stCondLst>
+                        <p:cond delay="indefinite"/>
+                      </p:stCondLst>
+                      <p:childTnLst>
+                        <p:par>
+                          <p:cTn id="9" fill="hold">
+                            <p:stCondLst>
+                              <p:cond delay="0"/>
+                            </p:stCondLst>
+                            <p:childTnLst>
+                              <p:par>
+                                <p:cTn id="10" presetID="10" presetClass="entr" presetSubtype="0" fill="hold" grpId="0" nodeType="clickEffect">
+                                  <p:stCondLst>
+                                    <p:cond delay="0"/>
+                                  </p:stCondLst>
+                                  <p:childTnLst>
+                                    <p:set>
+                                      <p:cBhvr>
+                                        <p:cTn id="11" dur="1" fill="hold">
+                                          <p:stCondLst>
+                                            <p:cond delay="0"/>
+                                          </p:stCondLst>
+                                        </p:cTn>
+                                        <p:tgtEl>
+                                          <p:spTgt spid="11"/>
+                                        </p:tgtEl>
+                                        <p:attrNameLst>
+                                          <p:attrName>style.visibility</p:attrName>
+                                        </p:attrNameLst>
+                                      </p:cBhvr>
+                                      <p:to>
+                                        <p:strVal val="visible"/>
+                                      </p:to>
+                                    </p:set>
+                                    <p:animEffect transition="in" filter="fade">
+                                      <p:cBhvr>
+                                        <p:cTn id="12" dur="500"/>
+                                        <p:tgtEl>
+                                          <p:spTgt spid="11"/>
+                                        </p:tgtEl>
+                                      </p:cBhvr>
+                                    </p:animEffect>
+                                  </p:childTnLst>
+                                </p:cTn>
+                              </p:par>
+                            </p:childTnLst>
+                          </p:cTn>
+                        </p:par>
+                      </p:childTnLst>
+                    </p:cTn>
+                  </p:par>
+                  <p:par>
+                    <p:cTn id="13" fill="hold">
+                      <p:stCondLst>
+                        <p:cond delay="indefinite"/>
+                      </p:stCondLst>
+                      <p:childTnLst>
+                        <p:par>
+                          <p:cTn id="14" fill="hold">
+                            <p:stCondLst>
+                              <p:cond delay="0"/>
+                            </p:stCondLst>
+                            <p:childTnLst>
+                              <p:par>
+                                <p:cTn id="15" presetID="10" presetClass="entr" presetSubtype="0" fill="hold" grpId="0" nodeType="clickEffect">
+                                  <p:stCondLst>
+                                    <p:cond delay="0"/>
+                                  </p:stCondLst>
+                                  <p:childTnLst>
+                                    <p:set>
+                                      <p:cBhvr>
+                                        <p:cTn id="16" dur="1" fill="hold">
+                                          <p:stCondLst>
+                                            <p:cond delay="0"/>
+                                          </p:stCondLst>
+                                        </p:cTn>
+                                        <p:tgtEl>
+                                          <p:spTgt spid="10"/>
+                                        </p:tgtEl>
+                                        <p:attrNameLst>
+                                          <p:attrName>style.visibility</p:attrName>
+                                        </p:attrNameLst>
+                                      </p:cBhvr>
+                                      <p:to>
+                                        <p:strVal val="visible"/>
+                                      </p:to>
+                                    </p:set>
+                                    <p:animEffect transition="in" filter="fade">
+                                      <p:cBhvr>
+                                        <p:cTn id="17" dur="500"/>
+                                        <p:tgtEl>
+                                          <p:spTgt spid="10"/>
+                                        </p:tgtEl>
+                                      </p:cBhvr>
+                                    </p:animEffect>
+                                  </p:childTnLst>
+                                </p:cTn>
+                              </p:par>
+                            </p:childTnLst>
+                          </p:cTn>
+                        </p:par>
+                      </p:childTnLst>
+                    </p:cTn>
+                  </p:par>
+                  <p:par>
+                    <p:cTn id="18" fill="hold">
+                      <p:stCondLst>
+                        <p:cond delay="indefinite"/>
+                      </p:stCondLst>
+                      <p:childTnLst>
+                        <p:par>
+                          <p:cTn id="19" fill="hold">
+                            <p:stCondLst>
+                              <p:cond delay="0"/>
+                            </p:stCondLst>
+                            <p:childTnLst>
+                              <p:par>
+                                <p:cTn id="20" presetID="10" presetClass="entr" presetSubtype="0" fill="hold" grpId="0" nodeType="clickEffect">
+                                  <p:stCondLst>
+                                    <p:cond delay="0"/>
+                                  </p:stCondLst>
+                                  <p:childTnLst>
+                                    <p:set>
+                                      <p:cBhvr>
+                                        <p:cTn id="21" dur="1" fill="hold">
+                                          <p:stCondLst>
+                                            <p:cond delay="0"/>
+                                          </p:stCondLst>
+                                        </p:cTn>
+                                        <p:tgtEl>
+                                          <p:spTgt spid="9"/>
+                                        </p:tgtEl>
+                                        <p:attrNameLst>
+                                          <p:attrName>style.visibility</p:attrName>
+                                        </p:attrNameLst>
+                                      </p:cBhvr>
+                                      <p:to>
+                                        <p:strVal val="visible"/>
+                                      </p:to>
+                                    </p:set>
+                                    <p:animEffect transition="in" filter="fade">
+                                      <p:cBhvr>
+                                        <p:cTn id="22" dur="500"/>
+                                        <p:tgtEl>
+                                          <p:spTgt spid="9"/>
+                                        </p:tgtEl>
+                                      </p:cBhvr>
+                                    </p:animEffect>
+                                  </p:childTnLst>
+                                </p:cTn>
+                              </p:par>
+                            </p:childTnLst>
+                          </p:cTn>
+                        </p:par>
+                      </p:childTnLst>
+                    </p:cTn>
+                  </p:par>
+                </p:childTnLst>
+              </p:cTn>
+              <p:prevCondLst>
+                <p:cond evt="onPrev" delay="0">
+                  <p:tgtEl>
+                    <p:sldTgt/>
+                  </p:tgtEl>
+                </p:cond>
+              </p:prevCondLst>
+              <p:nextCondLst>
+                <p:cond evt="onNext" delay="0">
+                  <p:tgtEl>
+                    <p:sldTgt/>
+                  </p:tgtEl>
+                </p:cond>
+              </p:nextCondLst>
+            </p:seq>
+          </p:childTnLst>
+        </p:cTn>
       </p:par>
     </p:tnLst>
+    <p:bldLst>
+      <p:bldP spid="8" grpId="0" animBg="1"/>
+      <p:bldP spid="9" grpId="0" animBg="1"/>
+      <p:bldP spid="10" grpId="0" animBg="1"/>
+      <p:bldP spid="11" grpId="0" animBg="1"/>
+    </p:bldLst>
   </p:timing>
 </p:sld>
 </file>
@@ -4959,7 +6055,7 @@
         </p:nvSpPr>
         <p:spPr bwMode="auto">
           <a:xfrm>
-            <a:off x="4335362" y="-109178"/>
+            <a:off x="4335362" y="0"/>
             <a:ext cx="7856638" cy="6555641"/>
           </a:xfrm>
           <a:prstGeom prst="rect">
@@ -5671,7 +6767,7 @@
         </p:nvSpPr>
         <p:spPr bwMode="auto">
           <a:xfrm>
-            <a:off x="7539993" y="55290"/>
+            <a:off x="8229310" y="125902"/>
             <a:ext cx="3007555" cy="861774"/>
           </a:xfrm>
           <a:prstGeom prst="rect">
@@ -6003,8 +7099,8 @@
         </p:blipFill>
         <p:spPr bwMode="auto">
           <a:xfrm>
-            <a:off x="103031" y="669701"/>
-            <a:ext cx="11771290" cy="4563485"/>
+            <a:off x="216691" y="810379"/>
+            <a:ext cx="11975309" cy="4642579"/>
           </a:xfrm>
           <a:prstGeom prst="rect">
             <a:avLst/>
@@ -6031,7 +7127,7 @@
         </p:nvSpPr>
         <p:spPr bwMode="auto">
           <a:xfrm>
-            <a:off x="564814" y="5233187"/>
+            <a:off x="549591" y="5735055"/>
             <a:ext cx="11309507" cy="584775"/>
           </a:xfrm>
           <a:prstGeom prst="rect">
@@ -6275,65 +7371,6 @@
                 <a:schemeClr val="tx1"/>
               </a:solidFill>
               <a:effectLst/>
-              <a:cs typeface="Arial" panose="020B0604020202020204" pitchFamily="34" charset="0"/>
-            </a:endParaRPr>
-          </a:p>
-        </p:txBody>
-      </p:sp>
-      <p:sp>
-        <p:nvSpPr>
-          <p:cNvPr id="4" name="Rectangle 3"/>
-          <p:cNvSpPr/>
-          <p:nvPr/>
-        </p:nvSpPr>
-        <p:spPr>
-          <a:xfrm>
-            <a:off x="3092501" y="5941002"/>
-            <a:ext cx="8231742" cy="755400"/>
-          </a:xfrm>
-          <a:prstGeom prst="rect">
-            <a:avLst/>
-          </a:prstGeom>
-        </p:spPr>
-        <p:txBody>
-          <a:bodyPr wrap="none">
-            <a:spAutoFit/>
-          </a:bodyPr>
-          <a:lstStyle/>
-          <a:p>
-            <a:pPr algn="r" rtl="1">
-              <a:lnSpc>
-                <a:spcPct val="115000"/>
-              </a:lnSpc>
-              <a:spcAft>
-                <a:spcPts val="1000"/>
-              </a:spcAft>
-              <a:tabLst>
-                <a:tab pos="2837815" algn="l"/>
-              </a:tabLst>
-            </a:pPr>
-            <a:r>
-              <a:rPr lang="ar-DZ" sz="4000" b="1" dirty="0" smtClean="0">
-                <a:effectLst/>
-                <a:latin typeface="Calibri" panose="020F0502020204030204" pitchFamily="34" charset="0"/>
-                <a:ea typeface="Calibri" panose="020F0502020204030204" pitchFamily="34" charset="0"/>
-                <a:cs typeface="Times New Roman" panose="02020603050405020304" pitchFamily="18" charset="0"/>
-              </a:rPr>
-              <a:t>في رأيك، ما نتيجة الصيغة التالية : </a:t>
-            </a:r>
-            <a:r>
-              <a:rPr lang="fr-FR" sz="4000" b="1" dirty="0" smtClean="0">
-                <a:effectLst/>
-                <a:latin typeface="Times New Roman" panose="02020603050405020304" pitchFamily="18" charset="0"/>
-                <a:ea typeface="Calibri" panose="020F0502020204030204" pitchFamily="34" charset="0"/>
-                <a:cs typeface="Arial" panose="020B0604020202020204" pitchFamily="34" charset="0"/>
-              </a:rPr>
-              <a:t>= 5 + 3 * 4</a:t>
-            </a:r>
-            <a:endParaRPr lang="fr-FR" sz="3200" b="1" dirty="0">
-              <a:effectLst/>
-              <a:latin typeface="Calibri" panose="020F0502020204030204" pitchFamily="34" charset="0"/>
-              <a:ea typeface="Calibri" panose="020F0502020204030204" pitchFamily="34" charset="0"/>
               <a:cs typeface="Arial" panose="020B0604020202020204" pitchFamily="34" charset="0"/>
             </a:endParaRPr>
           </a:p>
@@ -6365,6 +7402,40 @@
 <file path=ppt/slides/slide7.xml><?xml version="1.0" encoding="utf-8"?>
 <p:sld xmlns:a="http://schemas.openxmlformats.org/drawingml/2006/main" xmlns:r="http://schemas.openxmlformats.org/officeDocument/2006/relationships" xmlns:p="http://schemas.openxmlformats.org/presentationml/2006/main">
   <p:cSld>
+    <p:bg>
+      <p:bgPr>
+        <a:gradFill>
+          <a:gsLst>
+            <a:gs pos="0">
+              <a:schemeClr val="accent1">
+                <a:lumMod val="5000"/>
+                <a:lumOff val="95000"/>
+              </a:schemeClr>
+            </a:gs>
+            <a:gs pos="100000">
+              <a:schemeClr val="accent1">
+                <a:lumMod val="45000"/>
+                <a:lumOff val="55000"/>
+              </a:schemeClr>
+            </a:gs>
+            <a:gs pos="100000">
+              <a:schemeClr val="accent1">
+                <a:lumMod val="45000"/>
+                <a:lumOff val="55000"/>
+              </a:schemeClr>
+            </a:gs>
+            <a:gs pos="100000">
+              <a:schemeClr val="accent1">
+                <a:lumMod val="30000"/>
+                <a:lumOff val="70000"/>
+              </a:schemeClr>
+            </a:gs>
+          </a:gsLst>
+          <a:lin ang="5400000" scaled="1"/>
+        </a:gradFill>
+        <a:effectLst/>
+      </p:bgPr>
+    </p:bg>
     <p:spTree>
       <p:nvGrpSpPr>
         <p:cNvPr id="1" name=""/>
@@ -6414,7 +7485,7 @@
               <a:buAutoNum type="arabicPeriod"/>
             </a:pPr>
             <a:r>
-              <a:rPr lang="ar-DZ" sz="3200" u="sng" dirty="0" smtClean="0">
+              <a:rPr lang="ar-DZ" sz="3200" b="1" u="sng" dirty="0" smtClean="0">
                 <a:solidFill>
                   <a:srgbClr val="FF0000"/>
                 </a:solidFill>
@@ -6423,7 +7494,7 @@
               <a:t> مفهوم </a:t>
             </a:r>
             <a:r>
-              <a:rPr lang="ar-DZ" sz="3200" u="sng" dirty="0">
+              <a:rPr lang="ar-DZ" sz="3200" b="1" u="sng" dirty="0">
                 <a:solidFill>
                   <a:srgbClr val="FF0000"/>
                 </a:solidFill>
@@ -6431,7 +7502,7 @@
               </a:rPr>
               <a:t>الصيغة :</a:t>
             </a:r>
-            <a:endParaRPr lang="en-US" sz="2400" u="sng" dirty="0">
+            <a:endParaRPr lang="en-US" sz="2400" b="1" u="sng" dirty="0">
               <a:solidFill>
                 <a:srgbClr val="FF0000"/>
               </a:solidFill>
@@ -6448,30 +7519,30 @@
               </a:spcAft>
             </a:pPr>
             <a:r>
-              <a:rPr lang="ar-SA" sz="3200" dirty="0">
+              <a:rPr lang="ar-SA" sz="3200" b="1" dirty="0">
                 <a:cs typeface="+mj-cs"/>
               </a:rPr>
               <a:t>هي عبارة حسابية أو منطقية مكونة من أعداد أو مراجع خلايا تطبق </a:t>
             </a:r>
             <a:r>
-              <a:rPr lang="ar-SA" sz="3200" dirty="0" err="1">
+              <a:rPr lang="ar-SA" sz="3200" b="1" dirty="0" err="1">
                 <a:cs typeface="+mj-cs"/>
               </a:rPr>
               <a:t>عليھا</a:t>
             </a:r>
             <a:r>
-              <a:rPr lang="ar-SA" sz="3200" dirty="0">
+              <a:rPr lang="ar-SA" sz="3200" b="1" dirty="0">
                 <a:cs typeface="+mj-cs"/>
               </a:rPr>
               <a:t> عمليات حسابية مثل (* ، + ، - ، / ) أو منطقية مثل ( و ، أو )</a:t>
             </a:r>
             <a:r>
-              <a:rPr lang="ar-DZ" sz="3200" dirty="0">
+              <a:rPr lang="ar-DZ" sz="3200" b="1" dirty="0">
                 <a:cs typeface="+mj-cs"/>
               </a:rPr>
               <a:t>.</a:t>
             </a:r>
-            <a:endParaRPr lang="en-US" sz="2400" dirty="0">
+            <a:endParaRPr lang="en-US" sz="2400" b="1" dirty="0">
               <a:cs typeface="+mj-cs"/>
             </a:endParaRPr>
           </a:p>
@@ -6485,12 +7556,12 @@
               </a:spcAft>
             </a:pPr>
             <a:r>
-              <a:rPr lang="ar-DZ" sz="3200" dirty="0">
+              <a:rPr lang="ar-DZ" sz="3200" b="1" dirty="0">
                 <a:cs typeface="+mj-cs"/>
               </a:rPr>
               <a:t> </a:t>
             </a:r>
-            <a:endParaRPr lang="en-US" sz="2400" dirty="0" smtClean="0">
+            <a:endParaRPr lang="en-US" sz="2400" b="1" dirty="0" smtClean="0">
               <a:cs typeface="+mj-cs"/>
             </a:endParaRPr>
           </a:p>
@@ -6507,7 +7578,7 @@
               </a:buClr>
             </a:pPr>
             <a:r>
-              <a:rPr lang="ar-DZ" sz="3200" u="sng" dirty="0" smtClean="0">
+              <a:rPr lang="ar-DZ" sz="3200" b="1" u="sng" dirty="0" smtClean="0">
                 <a:solidFill>
                   <a:srgbClr val="FF0000"/>
                 </a:solidFill>
@@ -6516,7 +7587,7 @@
               <a:t>2. </a:t>
             </a:r>
             <a:r>
-              <a:rPr lang="ar-SA" sz="3200" u="sng" dirty="0" smtClean="0">
+              <a:rPr lang="ar-SA" sz="3200" b="1" u="sng" dirty="0" smtClean="0">
                 <a:solidFill>
                   <a:srgbClr val="FF0000"/>
                 </a:solidFill>
@@ -6524,7 +7595,7 @@
               </a:rPr>
               <a:t>مراحل كتابة الصيغ :</a:t>
             </a:r>
-            <a:endParaRPr lang="en-US" sz="2400" dirty="0" smtClean="0">
+            <a:endParaRPr lang="en-US" sz="2400" b="1" dirty="0" smtClean="0">
               <a:solidFill>
                 <a:srgbClr val="FF0000"/>
               </a:solidFill>
@@ -6546,18 +7617,18 @@
               <a:buChar char="-"/>
             </a:pPr>
             <a:r>
-              <a:rPr lang="ar-DZ" sz="3200" dirty="0" smtClean="0">
+              <a:rPr lang="ar-DZ" sz="3200" b="1" dirty="0" smtClean="0">
                 <a:cs typeface="+mj-cs"/>
               </a:rPr>
               <a:t>نحدد </a:t>
             </a:r>
             <a:r>
-              <a:rPr lang="ar-DZ" sz="3200" dirty="0">
+              <a:rPr lang="ar-DZ" sz="3200" b="1" dirty="0">
                 <a:cs typeface="+mj-cs"/>
               </a:rPr>
               <a:t>اللغة الفرنسية.</a:t>
             </a:r>
-            <a:endParaRPr lang="en-US" sz="2400" dirty="0">
+            <a:endParaRPr lang="en-US" sz="2400" b="1" dirty="0">
               <a:cs typeface="+mj-cs"/>
             </a:endParaRPr>
           </a:p>
@@ -6576,12 +7647,12 @@
               <a:buChar char="-"/>
             </a:pPr>
             <a:r>
-              <a:rPr lang="ar-DZ" sz="3200" dirty="0">
+              <a:rPr lang="ar-DZ" sz="3200" b="1" dirty="0">
                 <a:cs typeface="+mj-cs"/>
               </a:rPr>
               <a:t>نحدد الخلية التي نريد أن تظهر فيها النتيجة.</a:t>
             </a:r>
-            <a:endParaRPr lang="en-US" sz="2400" dirty="0">
+            <a:endParaRPr lang="en-US" sz="2400" b="1" dirty="0">
               <a:cs typeface="+mj-cs"/>
             </a:endParaRPr>
           </a:p>
@@ -6600,13 +7671,13 @@
               <a:buChar char="-"/>
             </a:pPr>
             <a:r>
-              <a:rPr lang="ar-DZ" sz="3200" dirty="0">
+              <a:rPr lang="ar-DZ" sz="3200" b="1" dirty="0">
                 <a:cs typeface="+mj-cs"/>
               </a:rPr>
               <a:t>نكتب الرمز = متبوعا بالعملية </a:t>
             </a:r>
             <a:r>
-              <a:rPr lang="ar-DZ" sz="3200" dirty="0">
+              <a:rPr lang="ar-DZ" sz="3200" b="1" dirty="0">
                 <a:solidFill>
                   <a:srgbClr val="FF0000"/>
                 </a:solidFill>
@@ -6615,12 +7686,12 @@
               <a:t>مثل : </a:t>
             </a:r>
             <a:r>
-              <a:rPr lang="fr-FR" sz="3200" dirty="0">
+              <a:rPr lang="fr-FR" sz="3200" b="1" dirty="0">
                 <a:cs typeface="+mj-cs"/>
               </a:rPr>
               <a:t>=5+10</a:t>
             </a:r>
-            <a:endParaRPr lang="en-US" sz="2400" dirty="0">
+            <a:endParaRPr lang="en-US" sz="2400" b="1" dirty="0">
               <a:cs typeface="+mj-cs"/>
             </a:endParaRPr>
           </a:p>
@@ -6639,25 +7710,25 @@
               <a:buChar char="-"/>
             </a:pPr>
             <a:r>
-              <a:rPr lang="ar-DZ" sz="3200" dirty="0">
+              <a:rPr lang="ar-DZ" sz="3200" b="1" dirty="0">
                 <a:cs typeface="+mj-cs"/>
               </a:rPr>
               <a:t>نضغط على </a:t>
             </a:r>
             <a:r>
-              <a:rPr lang="fr-FR" sz="3200" dirty="0">
+              <a:rPr lang="fr-FR" sz="3200" b="1" dirty="0">
                 <a:cs typeface="+mj-cs"/>
               </a:rPr>
               <a:t>Entrée</a:t>
             </a:r>
             <a:r>
-              <a:rPr lang="ar-DZ" sz="3200" dirty="0">
+              <a:rPr lang="ar-DZ" sz="3200" b="1" dirty="0">
                 <a:cs typeface="+mj-cs"/>
               </a:rPr>
               <a:t> فتظهر النتيجة</a:t>
             </a:r>
             <a:r>
-              <a:rPr lang="ar-DZ" sz="3200" dirty="0" smtClean="0">
+              <a:rPr lang="ar-DZ" sz="3200" b="1" dirty="0" smtClean="0">
                 <a:cs typeface="+mj-cs"/>
               </a:rPr>
               <a:t>.</a:t>
@@ -6675,7 +7746,7 @@
                 <a:srgbClr val="000000"/>
               </a:buClr>
             </a:pPr>
-            <a:endParaRPr lang="ar-DZ" sz="3200" dirty="0">
+            <a:endParaRPr lang="ar-DZ" sz="3200" b="1" dirty="0">
               <a:latin typeface="Calibri" panose="020F0502020204030204" pitchFamily="34" charset="0"/>
               <a:ea typeface="Calibri" panose="020F0502020204030204" pitchFamily="34" charset="0"/>
               <a:cs typeface="+mj-cs"/>
@@ -6695,7 +7766,7 @@
               <a:buFont typeface="Times New Roman" panose="02020603050405020304" pitchFamily="18" charset="0"/>
               <a:buChar char="-"/>
             </a:pPr>
-            <a:endParaRPr lang="en-US" sz="2400" dirty="0">
+            <a:endParaRPr lang="en-US" sz="2400" b="1" dirty="0">
               <a:latin typeface="Calibri" panose="020F0502020204030204" pitchFamily="34" charset="0"/>
               <a:ea typeface="Calibri" panose="020F0502020204030204" pitchFamily="34" charset="0"/>
               <a:cs typeface="+mj-cs"/>
@@ -6729,6 +7800,40 @@
 <file path=ppt/slides/slide8.xml><?xml version="1.0" encoding="utf-8"?>
 <p:sld xmlns:a="http://schemas.openxmlformats.org/drawingml/2006/main" xmlns:r="http://schemas.openxmlformats.org/officeDocument/2006/relationships" xmlns:p="http://schemas.openxmlformats.org/presentationml/2006/main">
   <p:cSld>
+    <p:bg>
+      <p:bgPr>
+        <a:gradFill>
+          <a:gsLst>
+            <a:gs pos="0">
+              <a:schemeClr val="accent1">
+                <a:lumMod val="5000"/>
+                <a:lumOff val="95000"/>
+              </a:schemeClr>
+            </a:gs>
+            <a:gs pos="100000">
+              <a:schemeClr val="accent1">
+                <a:lumMod val="45000"/>
+                <a:lumOff val="55000"/>
+              </a:schemeClr>
+            </a:gs>
+            <a:gs pos="100000">
+              <a:schemeClr val="accent1">
+                <a:lumMod val="45000"/>
+                <a:lumOff val="55000"/>
+              </a:schemeClr>
+            </a:gs>
+            <a:gs pos="100000">
+              <a:schemeClr val="accent1">
+                <a:lumMod val="30000"/>
+                <a:lumOff val="70000"/>
+              </a:schemeClr>
+            </a:gs>
+          </a:gsLst>
+          <a:lin ang="5400000" scaled="1"/>
+        </a:gradFill>
+        <a:effectLst/>
+      </p:bgPr>
+    </p:bg>
     <p:spTree>
       <p:nvGrpSpPr>
         <p:cNvPr id="1" name=""/>
@@ -6776,7 +7881,7 @@
               </a:buClr>
             </a:pPr>
             <a:r>
-              <a:rPr lang="ar-DZ" sz="3200" u="sng" dirty="0" smtClean="0">
+              <a:rPr lang="ar-DZ" sz="3200" b="1" u="sng" dirty="0" smtClean="0">
                 <a:solidFill>
                   <a:srgbClr val="FF0000"/>
                 </a:solidFill>
@@ -6785,7 +7890,7 @@
               <a:t>3. </a:t>
             </a:r>
             <a:r>
-              <a:rPr lang="ar-SA" sz="3200" u="sng" dirty="0" smtClean="0">
+              <a:rPr lang="ar-SA" sz="3200" b="1" u="sng" dirty="0" smtClean="0">
                 <a:solidFill>
                   <a:srgbClr val="FF0000"/>
                 </a:solidFill>
@@ -6794,7 +7899,7 @@
               <a:t>أنواع </a:t>
             </a:r>
             <a:r>
-              <a:rPr lang="ar-SA" sz="3200" u="sng" dirty="0">
+              <a:rPr lang="ar-SA" sz="3200" b="1" u="sng" dirty="0">
                 <a:solidFill>
                   <a:srgbClr val="FF0000"/>
                 </a:solidFill>
@@ -6802,7 +7907,7 @@
               </a:rPr>
               <a:t>الصيغ :</a:t>
             </a:r>
-            <a:endParaRPr lang="en-US" sz="2400" dirty="0">
+            <a:endParaRPr lang="en-US" sz="2400" b="1" dirty="0">
               <a:solidFill>
                 <a:srgbClr val="FF0000"/>
               </a:solidFill>
@@ -6824,7 +7929,7 @@
               <a:buAutoNum type="arabic1Minus"/>
             </a:pPr>
             <a:r>
-              <a:rPr lang="ar-DZ" sz="3200" u="sng" dirty="0">
+              <a:rPr lang="ar-DZ" sz="3200" b="1" u="sng" dirty="0">
                 <a:solidFill>
                   <a:srgbClr val="00B050"/>
                 </a:solidFill>
@@ -6833,7 +7938,7 @@
               <a:t>الصيغ المباشرة :</a:t>
             </a:r>
             <a:r>
-              <a:rPr lang="ar-DZ" sz="3200" dirty="0">
+              <a:rPr lang="ar-DZ" sz="3200" b="1" dirty="0">
                 <a:solidFill>
                   <a:srgbClr val="00B050"/>
                 </a:solidFill>
@@ -6842,24 +7947,24 @@
               <a:t> </a:t>
             </a:r>
             <a:r>
-              <a:rPr lang="ar-DZ" sz="3200" dirty="0">
+              <a:rPr lang="ar-DZ" sz="3200" b="1" dirty="0">
                 <a:cs typeface="+mj-cs"/>
               </a:rPr>
               <a:t>تحتوي على الأعداد  مثال : 9</a:t>
             </a:r>
             <a:r>
-              <a:rPr lang="fr-FR" sz="3200" dirty="0">
+              <a:rPr lang="fr-FR" sz="3200" b="1" dirty="0">
                 <a:cs typeface="+mj-cs"/>
               </a:rPr>
               <a:t>+</a:t>
             </a:r>
             <a:r>
-              <a:rPr lang="ar-DZ" sz="3200" dirty="0">
+              <a:rPr lang="ar-DZ" sz="3200" b="1" dirty="0">
                 <a:cs typeface="+mj-cs"/>
               </a:rPr>
               <a:t>4= </a:t>
             </a:r>
-            <a:endParaRPr lang="en-US" sz="2400" dirty="0">
+            <a:endParaRPr lang="en-US" sz="2400" b="1" dirty="0">
               <a:cs typeface="+mj-cs"/>
             </a:endParaRPr>
           </a:p>
@@ -6878,7 +7983,7 @@
               <a:buAutoNum type="arabic1Minus"/>
             </a:pPr>
             <a:r>
-              <a:rPr lang="ar-DZ" sz="3200" u="sng" smtClean="0">
+              <a:rPr lang="ar-DZ" sz="3200" b="1" u="sng" smtClean="0">
                 <a:solidFill>
                   <a:srgbClr val="00B050"/>
                 </a:solidFill>
@@ -6887,7 +7992,7 @@
               <a:t> الصيغ </a:t>
             </a:r>
             <a:r>
-              <a:rPr lang="ar-DZ" sz="3200" u="sng" dirty="0">
+              <a:rPr lang="ar-DZ" sz="3200" b="1" u="sng" dirty="0">
                 <a:solidFill>
                   <a:srgbClr val="00B050"/>
                 </a:solidFill>
@@ -6896,24 +8001,24 @@
               <a:t>باستعمال مراجع الخلايا : </a:t>
             </a:r>
             <a:r>
-              <a:rPr lang="ar-DZ" sz="3200" dirty="0">
+              <a:rPr lang="ar-DZ" sz="3200" b="1" dirty="0">
                 <a:cs typeface="+mj-cs"/>
               </a:rPr>
               <a:t>(غير مباشرة) :  مثال :</a:t>
             </a:r>
             <a:r>
-              <a:rPr lang="fr-FR" sz="3200" dirty="0">
+              <a:rPr lang="fr-FR" sz="3200" b="1" dirty="0">
                 <a:cs typeface="+mj-cs"/>
               </a:rPr>
               <a:t>A1+B1 </a:t>
             </a:r>
             <a:r>
-              <a:rPr lang="ar-DZ" sz="3200" dirty="0">
+              <a:rPr lang="ar-DZ" sz="3200" b="1" dirty="0">
                 <a:cs typeface="+mj-cs"/>
               </a:rPr>
               <a:t>= </a:t>
             </a:r>
-            <a:endParaRPr lang="en-US" sz="2400" dirty="0">
+            <a:endParaRPr lang="en-US" sz="2400" b="1" dirty="0">
               <a:latin typeface="Times New Roman" panose="02020603050405020304" pitchFamily="18" charset="0"/>
               <a:ea typeface="Calibri" panose="020F0502020204030204" pitchFamily="34" charset="0"/>
               <a:cs typeface="+mj-cs"/>
